--- a/CAPSTONE_POSTER.pptx
+++ b/CAPSTONE_POSTER.pptx
@@ -2896,8 +2896,8 @@
         </p:nvSpPr>
         <p:spPr>
           <a:xfrm>
-            <a:off x="102997" y="185316"/>
-            <a:ext cx="6670714" cy="534346"/>
+            <a:off x="102996" y="185316"/>
+            <a:ext cx="8474076" cy="688234"/>
           </a:xfrm>
           <a:prstGeom prst="rect">
             <a:avLst/>
@@ -2914,18 +2914,51 @@
           <a:lstStyle/>
           <a:p>
             <a:r>
-              <a:rPr lang="en-US" sz="3000" b="1" dirty="0">
-                <a:solidFill>
-                  <a:srgbClr val="007069"/>
-                </a:solidFill>
+              <a:rPr lang="en-IN" sz="2000" dirty="0">
                 <a:latin typeface="Inter"/>
                 <a:ea typeface="Inter"/>
                 <a:cs typeface="Inter"/>
                 <a:sym typeface="Inter"/>
               </a:rPr>
-              <a:t>BRAIN TUMOR CLASSIFICATION</a:t>
-            </a:r>
-            <a:endParaRPr sz="3000" dirty="0">
+              <a:t>Proposed </a:t>
+            </a:r>
+            <a:r>
+              <a:rPr lang="en-IN" sz="2000" dirty="0" err="1">
+                <a:latin typeface="Inter"/>
+                <a:ea typeface="Inter"/>
+                <a:cs typeface="Inter"/>
+                <a:sym typeface="Inter"/>
+              </a:rPr>
+              <a:t>Multimodel</a:t>
+            </a:r>
+            <a:r>
+              <a:rPr lang="en-IN" sz="2000" dirty="0">
+                <a:latin typeface="Inter"/>
+                <a:ea typeface="Inter"/>
+                <a:cs typeface="Inter"/>
+                <a:sym typeface="Inter"/>
+              </a:rPr>
+              <a:t> Explainable AI Techniques for Brain </a:t>
+            </a:r>
+            <a:r>
+              <a:rPr lang="en-IN" sz="2000" dirty="0" err="1">
+                <a:latin typeface="Inter"/>
+                <a:ea typeface="Inter"/>
+                <a:cs typeface="Inter"/>
+                <a:sym typeface="Inter"/>
+              </a:rPr>
+              <a:t>Tumor</a:t>
+            </a:r>
+            <a:r>
+              <a:rPr lang="en-IN" sz="2000" dirty="0">
+                <a:latin typeface="Inter"/>
+                <a:ea typeface="Inter"/>
+                <a:cs typeface="Inter"/>
+                <a:sym typeface="Inter"/>
+              </a:rPr>
+              <a:t> Classification</a:t>
+            </a:r>
+            <a:endParaRPr sz="2000" dirty="0">
               <a:latin typeface="Inter"/>
               <a:ea typeface="Inter"/>
               <a:cs typeface="Inter"/>
@@ -2942,8 +2975,8 @@
         </p:nvGrpSpPr>
         <p:grpSpPr>
           <a:xfrm>
-            <a:off x="168110" y="113899"/>
-            <a:ext cx="6540488" cy="603614"/>
+            <a:off x="168110" y="113898"/>
+            <a:ext cx="8130069" cy="778445"/>
             <a:chOff x="894442" y="2675335"/>
             <a:chExt cx="7570108" cy="940767"/>
           </a:xfrm>
@@ -3037,7 +3070,7 @@
         </p:nvSpPr>
         <p:spPr>
           <a:xfrm>
-            <a:off x="102997" y="731425"/>
+            <a:off x="102996" y="896156"/>
             <a:ext cx="6670714" cy="257347"/>
           </a:xfrm>
           <a:prstGeom prst="rect">
@@ -3133,8 +3166,8 @@
         </p:blipFill>
         <p:spPr>
           <a:xfrm>
-            <a:off x="7535010" y="94619"/>
-            <a:ext cx="1771550" cy="708750"/>
+            <a:off x="8235823" y="226666"/>
+            <a:ext cx="1262381" cy="574137"/>
           </a:xfrm>
           <a:prstGeom prst="rect">
             <a:avLst/>
@@ -3159,7 +3192,7 @@
         </p:nvSpPr>
         <p:spPr>
           <a:xfrm>
-            <a:off x="102997" y="904650"/>
+            <a:off x="102996" y="1073057"/>
             <a:ext cx="3194752" cy="257347"/>
           </a:xfrm>
           <a:prstGeom prst="rect">
@@ -3214,8 +3247,8 @@
         </p:nvSpPr>
         <p:spPr>
           <a:xfrm>
-            <a:off x="167982" y="1159182"/>
-            <a:ext cx="4977177" cy="307777"/>
+            <a:off x="167976" y="1317188"/>
+            <a:ext cx="4977175" cy="307777"/>
           </a:xfrm>
           <a:prstGeom prst="rect">
             <a:avLst/>
@@ -3534,8 +3567,8 @@
         </p:nvSpPr>
         <p:spPr>
           <a:xfrm>
-            <a:off x="167979" y="1400977"/>
-            <a:ext cx="4977178" cy="3693177"/>
+            <a:off x="167979" y="1413152"/>
+            <a:ext cx="4977178" cy="3681002"/>
           </a:xfrm>
           <a:prstGeom prst="rect">
             <a:avLst/>
@@ -3552,6 +3585,10 @@
             <a:noAutofit/>
           </a:bodyPr>
           <a:lstStyle/>
+          <a:p>
+            <a:pPr algn="just"/>
+            <a:endParaRPr lang="en-US" dirty="0"/>
+          </a:p>
           <a:p>
             <a:pPr algn="just"/>
             <a:r>
@@ -3630,7 +3667,7 @@
             </a:r>
             <a:r>
               <a:rPr lang="en-US" dirty="0"/>
-              <a:t>. Methods Programs Biomed., vol. 237, p. 107567, 2024.</a:t>
+              <a:t>. Methods Programs Biomed., IEEE vol. 237, p. 107567, 2024.</a:t>
             </a:r>
           </a:p>
           <a:p>
@@ -3645,7 +3682,7 @@
             </a:r>
             <a:r>
               <a:rPr lang="en-US" dirty="0"/>
-              <a:t>, vol. 19, no. 5, p. e0301234, 2024.</a:t>
+              <a:t>, IEEE vol. 19, no. 5, p. e0301234, 2024.</a:t>
             </a:r>
           </a:p>
           <a:p>
@@ -3660,7 +3697,15 @@
             </a:r>
             <a:r>
               <a:rPr lang="en-IN" dirty="0"/>
-              <a:t>, vol. 15, no. 8, 2024. </a:t>
+              <a:t>, </a:t>
+            </a:r>
+            <a:r>
+              <a:rPr lang="en-US" i="1" dirty="0" err="1"/>
+              <a:t>arXiv</a:t>
+            </a:r>
+            <a:r>
+              <a:rPr lang="en-IN" dirty="0"/>
+              <a:t> vol. 15, no. 8, 2024. </a:t>
             </a:r>
           </a:p>
           <a:p>
@@ -3727,7 +3772,7 @@
         <p:spPr>
           <a:xfrm>
             <a:off x="167978" y="9040270"/>
-            <a:ext cx="4977175" cy="1560920"/>
+            <a:ext cx="4977175" cy="1398792"/>
           </a:xfrm>
           <a:prstGeom prst="rect">
             <a:avLst/>
@@ -3747,39 +3792,39 @@
           <a:p>
             <a:pPr algn="just"/>
             <a:r>
+              <a:rPr lang="en-IN" dirty="0"/>
+              <a:t>1. The e</a:t>
+            </a:r>
+            <a:r>
+              <a:rPr lang="en-US" dirty="0" err="1"/>
+              <a:t>xisting</a:t>
+            </a:r>
+            <a:r>
               <a:rPr lang="en-US" dirty="0"/>
-              <a:t>1. Most systems focus only on classification and do not combine localization and interpretability in a single framework.</a:t>
+              <a:t> system relies on single-model classification and lacks ensemble learning for improved accuracy.</a:t>
             </a:r>
           </a:p>
           <a:p>
             <a:pPr algn="just"/>
             <a:r>
               <a:rPr lang="en-IN" dirty="0"/>
-              <a:t>2. </a:t>
+              <a:t>2. The existing approach lacks </a:t>
             </a:r>
             <a:r>
               <a:rPr lang="en-US" dirty="0"/>
-              <a:t>Models act as black boxes and do not provide visual insights into tumor regions.</a:t>
+              <a:t>interpretability and do not explain which image regions influence predictions.</a:t>
             </a:r>
           </a:p>
           <a:p>
             <a:pPr algn="just"/>
             <a:r>
               <a:rPr lang="en-US" dirty="0"/>
-              <a:t>3. Models struggle to adapt to different MRI datasets and require high computational resources.</a:t>
-            </a:r>
-          </a:p>
-          <a:p>
-            <a:pPr algn="just"/>
-            <a:endParaRPr lang="en-US" dirty="0"/>
-          </a:p>
-          <a:p>
-            <a:pPr algn="just"/>
-            <a:endParaRPr lang="en-US" dirty="0"/>
-          </a:p>
-          <a:p>
-            <a:pPr algn="just"/>
-            <a:endParaRPr lang="en-IN" dirty="0"/>
+              <a:t>3. The existing system does not provide tumor localization after classification.</a:t>
+            </a:r>
+            <a:r>
+              <a:rPr lang="en-IN" dirty="0"/>
+              <a:t> </a:t>
+            </a:r>
           </a:p>
         </p:txBody>
       </p:sp>
@@ -3819,7 +3864,7 @@
             <a:pPr algn="just"/>
             <a:r>
               <a:rPr lang="en-US" dirty="0"/>
-              <a:t>The proposed methodology follows a structured pipeline for brain tumor classification and localization using MRI images. The input images are fed into advanced deep learning models such as EfficientNetB0 and DenseNet121 for feature extraction and classification using transfer learning, while </a:t>
+              <a:t>The proposed methodology follows a structured pipeline for brain tumor classification and localization of the MRI images. The input images are fed into advanced deep learning models such as EfficientNetB0 and DenseNet121 for feature extraction and classification using transfer learning, while </a:t>
             </a:r>
             <a:r>
               <a:rPr lang="en-US" dirty="0" err="1"/>
@@ -3827,7 +3872,7 @@
             </a:r>
             <a:r>
               <a:rPr lang="en-US" dirty="0"/>
-              <a:t> is used to provide interpretability of predictions. A voting-based ensemble approach is applied to combine the outputs of all models and improve overall accuracy and reliability. Finally, tumor localization is performed using OpenCV-based image processing techniques, including thresholding and contour detection, to identify and highlight tumor regions within the MRI images.</a:t>
+              <a:t> model is used to provide interpretability of predictions. A voting-based ensemble approach is applied to combine the outputs of all models and improve overall accuracy and reliability. Finally, tumor localization is performed using traditional OpenCV-based image processing techniques, including thresholding and contour detection, to identify and highlight tumor regions within the MRI images.</a:t>
             </a:r>
           </a:p>
           <a:p>
@@ -3872,7 +3917,7 @@
             <a:pPr algn="just"/>
             <a:r>
               <a:rPr lang="en-US" dirty="0"/>
-              <a:t>1. During training, EfficientNetB0 achieved 90.74% accuracy with 90.93% precision and 90.47% recall, during testing it achieved an accuracy of 87.26%.</a:t>
+              <a:t>1. EfficientNetB0 achieved 90.74% accuracy with 90.93% precision and 90.47% recall during training and during testing it achieved an accuracy of 87.26%.</a:t>
             </a:r>
           </a:p>
           <a:p>
@@ -3883,7 +3928,7 @@
             </a:r>
             <a:r>
               <a:rPr lang="en-US" dirty="0"/>
-              <a:t>DenseNet121 achieved 80.95% training accuracy with 82.78% precision and 78.87% recall, and  during testing it achieved an accuracy of 83.51%.</a:t>
+              <a:t>DenseNet121 achieved 80.95% accuracy with 82.78% precision and 78.87% recall during training, and  during testing it achieved an accuracy of 83.51%.</a:t>
             </a:r>
           </a:p>
           <a:p>
@@ -3898,7 +3943,7 @@
             </a:r>
             <a:r>
               <a:rPr lang="en-US" dirty="0"/>
-              <a:t> achieved 93.55% training accuracy with 93.59% precision and 93.55% recall, and outperformed other models during testing with the highest accuracy of 85.67%.</a:t>
+              <a:t> achieved 93.55% accuracy with 93.59% precision and 93.55% recall during training, and during testing it achieved an accuracy of 85.67%.</a:t>
             </a:r>
             <a:endParaRPr lang="en-IN" dirty="0"/>
           </a:p>
@@ -3948,7 +3993,15 @@
             </a:r>
             <a:r>
               <a:rPr lang="en-IN" dirty="0"/>
-              <a:t>, vol. 15, no. 8, 2024.</a:t>
+              <a:t>, </a:t>
+            </a:r>
+            <a:r>
+              <a:rPr lang="en-US" dirty="0"/>
+              <a:t>IEEE </a:t>
+            </a:r>
+            <a:r>
+              <a:rPr lang="en-IN" dirty="0"/>
+              <a:t>vol. 15, no. 8, 2024.</a:t>
             </a:r>
           </a:p>
           <a:p>
@@ -3967,7 +4020,15 @@
             </a:r>
             <a:r>
               <a:rPr lang="en-US" dirty="0"/>
-              <a:t>, vol. 19, no. 5, p. e0301234, 2024.</a:t>
+              <a:t>, </a:t>
+            </a:r>
+            <a:r>
+              <a:rPr lang="en-US" i="1" dirty="0" err="1"/>
+              <a:t>arXiv</a:t>
+            </a:r>
+            <a:r>
+              <a:rPr lang="en-US" dirty="0"/>
+              <a:t> vol. 19, no. 5, p. e0301234, 2024.</a:t>
             </a:r>
             <a:endParaRPr lang="en-IN" dirty="0"/>
           </a:p>
@@ -3987,7 +4048,7 @@
         </p:nvSpPr>
         <p:spPr>
           <a:xfrm>
-            <a:off x="167979" y="10670945"/>
+            <a:off x="167977" y="10572179"/>
             <a:ext cx="4977174" cy="307777"/>
           </a:xfrm>
           <a:prstGeom prst="rect">
@@ -4034,7 +4095,7 @@
         </p:nvSpPr>
         <p:spPr>
           <a:xfrm>
-            <a:off x="167978" y="10917249"/>
+            <a:off x="167978" y="10855501"/>
             <a:ext cx="4977173" cy="1557906"/>
           </a:xfrm>
           <a:prstGeom prst="rect">
@@ -4213,6 +4274,7 @@
               <a:rPr lang="en-US" dirty="0"/>
               <a:t>: Meningioma (89.26%)</a:t>
             </a:r>
+            <a:endParaRPr lang="en-US" b="1" dirty="0"/>
           </a:p>
           <a:p>
             <a:r>
@@ -4248,16 +4310,32 @@
           </a:p>
           <a:p>
             <a:r>
+              <a:rPr lang="en-IN" dirty="0"/>
+              <a:t>The </a:t>
+            </a:r>
+            <a:r>
+              <a:rPr lang="en-IN" b="1" dirty="0" err="1"/>
+              <a:t>Tumor</a:t>
+            </a:r>
+            <a:r>
               <a:rPr lang="en-IN" b="1" dirty="0"/>
-              <a:t>TUMOR LOCALIZATION </a:t>
-            </a:r>
-            <a:r>
-              <a:rPr lang="en-IN" b="1" dirty="0">
+              <a:t> Localization</a:t>
+            </a:r>
+            <a:r>
+              <a:rPr lang="en-IN" dirty="0">
                 <a:sym typeface="Wingdings" panose="05000000000000000000" pitchFamily="2" charset="2"/>
               </a:rPr>
-              <a:t> </a:t>
-            </a:r>
-            <a:endParaRPr lang="en-IN" b="1" dirty="0"/>
+              <a:t> of the</a:t>
+            </a:r>
+          </a:p>
+          <a:p>
+            <a:r>
+              <a:rPr lang="en-IN" dirty="0">
+                <a:sym typeface="Wingdings" panose="05000000000000000000" pitchFamily="2" charset="2"/>
+              </a:rPr>
+              <a:t>MRI scan image is this  </a:t>
+            </a:r>
+            <a:endParaRPr lang="en-IN" dirty="0"/>
           </a:p>
         </p:txBody>
       </p:sp>
@@ -4283,7 +4361,7 @@
         </p:blipFill>
         <p:spPr>
           <a:xfrm>
-            <a:off x="7879018" y="6343055"/>
+            <a:off x="7906718" y="6221210"/>
             <a:ext cx="1340707" cy="1337429"/>
           </a:xfrm>
           <a:prstGeom prst="rect">
@@ -4313,7 +4391,7 @@
         </p:blipFill>
         <p:spPr>
           <a:xfrm>
-            <a:off x="8298179" y="4502255"/>
+            <a:off x="8269731" y="4815690"/>
             <a:ext cx="1134906" cy="1203688"/>
           </a:xfrm>
           <a:prstGeom prst="rect">
